--- a/dist/초4/과학/땅과밤하늘/초4_과학_땅과밤하늘_01_흐르는물과땅_학생용.pptx
+++ b/dist/초4/과학/땅과밤하늘/초4_과학_땅과밤하늘_01_흐르는물과땅_학생용.pptx
@@ -120,13 +120,13 @@
   <p:extLst>
     <p:ext uri="{521415D9-36F7-43E2-AB2F-B90AF26B5E84}">
       <p14:sectionLst xmlns:p14="http://schemas.microsoft.com/office/powerpoint/2010/main">
-        <p14:section name="도입" id="{f23448f1-6580-1b1e-75c8-1277d6922eaf}">
+        <p14:section name="도입" id="{90c52398-2acd-04b8-f962-36c6ae753cee}">
           <p14:sldIdLst>
             <p14:sldId id="256"/>
             <p14:sldId id="257"/>
           </p14:sldIdLst>
         </p14:section>
-        <p14:section name="연습" id="{3d01cafe-59e0-32a2-cf46-9ab5da97df86}">
+        <p14:section name="연습" id="{db873ce7-3021-d5b0-0439-022bab4107cb}">
           <p14:sldIdLst>
             <p14:sldId id="258"/>
             <p14:sldId id="259"/>
@@ -135,34 +135,34 @@
             <p14:sldId id="265"/>
           </p14:sldIdLst>
         </p14:section>
-        <p14:section name="개념" id="{72f137e4-d0b3-e323-7f4e-f3c817c6ca95}">
+        <p14:section name="개념" id="{06bde7a3-1418-93f9-7249-2431e6fd8884}">
           <p14:sldIdLst>
             <p14:sldId id="261"/>
             <p14:sldId id="263"/>
             <p14:sldId id="264"/>
           </p14:sldIdLst>
         </p14:section>
-        <p14:section name="연습" id="{1c06a0aa-5e69-bd0e-1bc2-27af7631ff6d}">
+        <p14:section name="연습" id="{51c76b33-13e4-8664-38f6-41e20ac90a5f}">
           <p14:sldIdLst/>
         </p14:section>
-        <p14:section name="개념" id="{43aa4c12-9593-1865-0f89-8be493f68069}">
+        <p14:section name="개념" id="{b7b1bc9a-ecd8-7616-fcb6-3c5e5da2cf4a}">
           <p14:sldIdLst/>
         </p14:section>
-        <p14:section name="연습" id="{cf57aa47-d5ec-99d4-93fa-13a8471b2a29}">
+        <p14:section name="연습" id="{6c932029-9163-20da-873a-f3d86b720be2}">
           <p14:sldIdLst/>
         </p14:section>
-        <p14:section name="확인" id="{88938bc5-8de5-5841-c6e1-35aa106fb89b}">
+        <p14:section name="확인" id="{60ff3790-4fe0-2748-e3b6-7015beb9d643}">
           <p14:sldIdLst>
             <p14:sldId id="266"/>
             <p14:sldId id="267"/>
           </p14:sldIdLst>
         </p14:section>
-        <p14:section name="정리" id="{3ce9606c-2542-a2e3-3a4b-da924f3d949d}">
+        <p14:section name="정리" id="{0c96020a-94c5-0f56-332b-2ed9dc953140}">
           <p14:sldIdLst>
             <p14:sldId id="268"/>
           </p14:sldIdLst>
         </p14:section>
-        <p14:section name="보충" id="{925b2bc4-9979-74af-7956-67c6a22912e1}">
+        <p14:section name="보충" id="{8598d318-226b-57bc-65bd-0e7abd01e545}">
           <p14:sldIdLst>
             <p14:sldId id="269"/>
           </p14:sldIdLst>

--- a/dist/초4/과학/땅과밤하늘/초4_과학_땅과밤하늘_01_흐르는물과땅_학생용.pptx
+++ b/dist/초4/과학/땅과밤하늘/초4_과학_땅과밤하늘_01_흐르는물과땅_학생용.pptx
@@ -120,13 +120,13 @@
   <p:extLst>
     <p:ext uri="{521415D9-36F7-43E2-AB2F-B90AF26B5E84}">
       <p14:sectionLst xmlns:p14="http://schemas.microsoft.com/office/powerpoint/2010/main">
-        <p14:section name="도입" id="{90c52398-2acd-04b8-f962-36c6ae753cee}">
+        <p14:section name="도입" id="{acc2b421-81a9-f9b4-f73a-3aa9ac02b390}">
           <p14:sldIdLst>
             <p14:sldId id="256"/>
             <p14:sldId id="257"/>
           </p14:sldIdLst>
         </p14:section>
-        <p14:section name="연습" id="{db873ce7-3021-d5b0-0439-022bab4107cb}">
+        <p14:section name="연습" id="{1faba293-dc7d-f445-6371-0a4f7aca8f9c}">
           <p14:sldIdLst>
             <p14:sldId id="258"/>
             <p14:sldId id="259"/>
@@ -135,34 +135,34 @@
             <p14:sldId id="265"/>
           </p14:sldIdLst>
         </p14:section>
-        <p14:section name="개념" id="{06bde7a3-1418-93f9-7249-2431e6fd8884}">
+        <p14:section name="개념" id="{d7579614-4e27-0e02-868b-9eaf7b4554b6}">
           <p14:sldIdLst>
             <p14:sldId id="261"/>
             <p14:sldId id="263"/>
             <p14:sldId id="264"/>
           </p14:sldIdLst>
         </p14:section>
-        <p14:section name="연습" id="{51c76b33-13e4-8664-38f6-41e20ac90a5f}">
+        <p14:section name="연습" id="{c3b798cc-16e6-0a1a-8eb9-17f92a1f45f0}">
           <p14:sldIdLst/>
         </p14:section>
-        <p14:section name="개념" id="{b7b1bc9a-ecd8-7616-fcb6-3c5e5da2cf4a}">
+        <p14:section name="개념" id="{27262b1e-3388-8f9f-babe-20feec07e38c}">
           <p14:sldIdLst/>
         </p14:section>
-        <p14:section name="연습" id="{6c932029-9163-20da-873a-f3d86b720be2}">
+        <p14:section name="연습" id="{1edfee11-a0cd-b818-b985-036271b00a4c}">
           <p14:sldIdLst/>
         </p14:section>
-        <p14:section name="확인" id="{60ff3790-4fe0-2748-e3b6-7015beb9d643}">
+        <p14:section name="확인" id="{936e0cf4-6a4e-5639-07e6-9d4f7b85199f}">
           <p14:sldIdLst>
             <p14:sldId id="266"/>
             <p14:sldId id="267"/>
           </p14:sldIdLst>
         </p14:section>
-        <p14:section name="정리" id="{0c96020a-94c5-0f56-332b-2ed9dc953140}">
+        <p14:section name="정리" id="{5313e707-d7f0-8d31-049f-4ec83c8cc391}">
           <p14:sldIdLst>
             <p14:sldId id="268"/>
           </p14:sldIdLst>
         </p14:section>
-        <p14:section name="보충" id="{8598d318-226b-57bc-65bd-0e7abd01e545}">
+        <p14:section name="보충" id="{e6ca2578-284f-d5fe-bc74-6d25e454563c}">
           <p14:sldIdLst>
             <p14:sldId id="269"/>
           </p14:sldIdLst>
